--- a/task166/golden/overlay_designation_alco.pptx
+++ b/task166/golden/overlay_designation_alco.pptx
@@ -3477,7 +3477,7 @@
               </a:defRPr>
             </a:pPr>
             <a:r>
-              <a:t>Averaged +200 bp loss in economic value over the month-ends of 2027: $150 million (to the nearest $25 million)</a:t>
+              <a:t>Averaged +200 bp loss in economic value over the month-ends of 2027: $150 million (to the nearest $10 million)</a:t>
             </a:r>
           </a:p>
         </p:txBody>
@@ -3516,7 +3516,7 @@
               </a:defRPr>
             </a:pPr>
             <a:r>
-              <a:t>About $3.0 billion of the pool's balloons fall due from December 2026 to December 2027, most of them written in the early-2022 push at full leverage. At the planning cycle's 6.95 per cent few can carry a new loan of their balance; about four-fifths of that principal is expected to extend for 36 months at its note rate.</a:t>
+              <a:t>About $4.7 billion of the pool's balloons fall due from December 2026 to December 2027, most of them written in the early-2022 push. At the planning cycle's 6.95 per cent the push's cash-out loans, sized at full leverage on pro forma rents, cannot carry a new loan of their balance; about three-fifths of that principal is expected to extend for 36 months at its note rate.</a:t>
             </a:r>
           </a:p>
           <a:p>
@@ -3648,7 +3648,7 @@
                         <a:defRPr sz="1300" b="1"/>
                       </a:pPr>
                       <a:r>
-                        <a:t>3.89</a:t>
+                        <a:t>5.29</a:t>
                       </a:r>
                     </a:p>
                   </a:txBody>
@@ -3757,7 +3757,7 @@
                         <a:defRPr sz="1300" b="0"/>
                       </a:pPr>
                       <a:r>
-                        <a:t>85</a:t>
+                        <a:t>90</a:t>
                       </a:r>
                     </a:p>
                   </a:txBody>
@@ -3804,7 +3804,7 @@
                         <a:defRPr sz="1300" b="0"/>
                       </a:pPr>
                       <a:r>
-                        <a:t>65</a:t>
+                        <a:t>70</a:t>
                       </a:r>
                     </a:p>
                   </a:txBody>
@@ -3896,7 +3896,7 @@
               </a:defRPr>
             </a:pPr>
             <a:r>
-              <a:t>Losses to the nearest $5 million; principal at 30 November 2026.</a:t>
+              <a:t>Losses to the nearest $10 million; principal at 30 November 2026.</a:t>
             </a:r>
           </a:p>
         </p:txBody>
@@ -3935,7 +3935,7 @@
               </a:defRPr>
             </a:pPr>
             <a:r>
-              <a:t>Trade Tuesday 15 December 2026, effective Monday 4 January 2027, maturity Monday 6 January 2031.</a:t>
+              <a:t>$1.2 billion pay-fixed for four years: trades Tuesday 15 December 2026, starts Monday 4 January 2027.</a:t>
             </a:r>
           </a:p>
         </p:txBody>

--- a/task166/golden/overlay_designation_alco.pptx
+++ b/task166/golden/overlay_designation_alco.pptx
@@ -3516,7 +3516,7 @@
               </a:defRPr>
             </a:pPr>
             <a:r>
-              <a:t>About $4.7 billion of the pool's balloons fall due from December 2026 to December 2027, most of them written in the early-2022 push. At the planning cycle's 6.95 per cent the push's cash-out loans, sized at full leverage on pro forma rents, cannot carry a new loan of their balance; about three-fifths of that principal is expected to extend for 36 months at its note rate.</a:t>
+              <a:t>About $3.2 billion of the pool's balloons fall due from December 2026 to December 2027, most of them written in the early-2022 push on pro forma rents. At the planning cycle's 6.95 per cent few of those properties' incomes can carry a new loan of their balance; about nine-tenths of that principal is expected to take the bank's 36-month extension.</a:t>
             </a:r>
           </a:p>
           <a:p>
@@ -3648,7 +3648,7 @@
                         <a:defRPr sz="1300" b="1"/>
                       </a:pPr>
                       <a:r>
-                        <a:t>5.29</a:t>
+                        <a:t>3.64</a:t>
                       </a:r>
                     </a:p>
                   </a:txBody>

--- a/task166/golden/overlay_designation_alco.pptx
+++ b/task166/golden/overlay_designation_alco.pptx
@@ -3516,7 +3516,7 @@
               </a:defRPr>
             </a:pPr>
             <a:r>
-              <a:t>About $3.2 billion of the pool's balloons fall due from December 2026 to December 2027, most of them written in the early-2022 push on pro forma rents. At the planning cycle's 6.95 per cent few of those properties' incomes can carry a new loan of their balance; about nine-tenths of that principal is expected to take the bank's 36-month extension.</a:t>
+              <a:t>About $2.6 billion of the pool's balloons fall due from December 2026 to December 2027, most of them written in the early-2022 push on pro forma rents. At the planning cycle's 6.95 per cent few of those properties' incomes can carry a new loan of their balance; over nine-tenths of that principal is expected to take the bank's 36-month extension.</a:t>
             </a:r>
           </a:p>
           <a:p>
@@ -3548,7 +3548,7 @@
               </a:defRPr>
             </a:pPr>
             <a:r>
-              <a:t>The 2023-24 mortgages lose most at last year's prepayment speed, but at 6.25 per cent they are expected to prepay about 30 per cent a year in 2027.</a:t>
+              <a:t>The 2023-24 mortgages would lose more than agency MBS only at last year's prepayment speed; at 6.25 per cent they are expected to prepay about 30 per cent a year in 2027.</a:t>
             </a:r>
           </a:p>
         </p:txBody>
@@ -3648,7 +3648,7 @@
                         <a:defRPr sz="1300" b="1"/>
                       </a:pPr>
                       <a:r>
-                        <a:t>3.64</a:t>
+                        <a:t>3.62</a:t>
                       </a:r>
                     </a:p>
                   </a:txBody>
